--- a/presentation/260916_AI활용_업무지침네비게이터_2차 수정.pptx
+++ b/presentation/260916_AI활용_업무지침네비게이터_2차 수정.pptx
@@ -9963,18 +9963,128 @@
                   </a:schemeClr>
                 </a:solidFill>
               </a:rPr>
-              <a:t>정확도 검증은 투자</a:t>
+              <a:t>정확도 검증은 </a:t>
+            </a:r>
+            <a:r>
+              <a:rPr lang="ko-KR" altLang="en-US" sz="1500" b="1">
+                <a:solidFill>
+                  <a:schemeClr val="tx1">
+                    <a:lumMod val="95000"/>
+                    <a:lumOff val="5000"/>
+                  </a:schemeClr>
+                </a:solidFill>
+              </a:rPr>
+              <a:t>투자</a:t>
             </a:r>
             <a:r>
               <a:rPr lang="en-US" altLang="ko-KR" sz="1500" b="1">
                 <a:solidFill>
                   <a:schemeClr val="tx1">
-                    <a:lumMod val="50000"/>
-                    <a:lumOff val="50000"/>
+                    <a:lumMod val="95000"/>
+                    <a:lumOff val="5000"/>
                   </a:schemeClr>
                 </a:solidFill>
               </a:rPr>
               <a:t>·</a:t>
+            </a:r>
+            <a:r>
+              <a:rPr lang="ko-KR" altLang="en-US" sz="1500" b="1">
+                <a:solidFill>
+                  <a:schemeClr val="tx1">
+                    <a:lumMod val="95000"/>
+                    <a:lumOff val="5000"/>
+                  </a:schemeClr>
+                </a:solidFill>
+              </a:rPr>
+              <a:t>공사</a:t>
+            </a:r>
+            <a:r>
+              <a:rPr lang="en-US" altLang="ko-KR" sz="1500" b="1">
+                <a:solidFill>
+                  <a:schemeClr val="tx1">
+                    <a:lumMod val="95000"/>
+                    <a:lumOff val="5000"/>
+                  </a:schemeClr>
+                </a:solidFill>
+              </a:rPr>
+              <a:t>, </a:t>
+            </a:r>
+            <a:r>
+              <a:rPr lang="ko-KR" altLang="en-US" sz="1500" b="1">
+                <a:solidFill>
+                  <a:schemeClr val="tx1">
+                    <a:lumMod val="95000"/>
+                    <a:lumOff val="5000"/>
+                  </a:schemeClr>
+                </a:solidFill>
+              </a:rPr>
+              <a:t>재무</a:t>
+            </a:r>
+            <a:r>
+              <a:rPr lang="en-US" altLang="ko-KR" sz="1500" b="1">
+                <a:solidFill>
+                  <a:schemeClr val="tx1">
+                    <a:lumMod val="95000"/>
+                    <a:lumOff val="5000"/>
+                  </a:schemeClr>
+                </a:solidFill>
+              </a:rPr>
+              <a:t>·</a:t>
+            </a:r>
+            <a:r>
+              <a:rPr lang="ko-KR" altLang="en-US" sz="1500" b="1">
+                <a:solidFill>
+                  <a:schemeClr val="tx1">
+                    <a:lumMod val="95000"/>
+                    <a:lumOff val="5000"/>
+                  </a:schemeClr>
+                </a:solidFill>
+              </a:rPr>
+              <a:t>회계 업무</a:t>
+            </a:r>
+            <a:r>
+              <a:rPr lang="en-US" altLang="ko-KR" sz="1500" b="1">
+                <a:solidFill>
+                  <a:schemeClr val="tx1">
+                    <a:lumMod val="95000"/>
+                    <a:lumOff val="5000"/>
+                  </a:schemeClr>
+                </a:solidFill>
+              </a:rPr>
+              <a:t>(9</a:t>
+            </a:r>
+            <a:r>
+              <a:rPr lang="ko-KR" altLang="en-US" sz="1500" b="1">
+                <a:solidFill>
+                  <a:schemeClr val="tx1">
+                    <a:lumMod val="95000"/>
+                    <a:lumOff val="5000"/>
+                  </a:schemeClr>
+                </a:solidFill>
+              </a:rPr>
+              <a:t>개 부서</a:t>
+            </a:r>
+            <a:r>
+              <a:rPr lang="en-US" altLang="ko-KR" sz="1500" b="1">
+                <a:solidFill>
+                  <a:schemeClr val="tx1">
+                    <a:lumMod val="95000"/>
+                    <a:lumOff val="5000"/>
+                  </a:schemeClr>
+                </a:solidFill>
+              </a:rPr>
+              <a:t>) </a:t>
+            </a:r>
+            <a:r>
+              <a:rPr lang="ko-KR" altLang="en-US" sz="1500" b="1">
+                <a:solidFill>
+                  <a:schemeClr val="tx1">
+                    <a:lumMod val="95000"/>
+                    <a:lumOff val="5000"/>
+                  </a:schemeClr>
+                </a:solidFill>
+              </a:rPr>
+              <a:t>중심</a:t>
             </a:r>
             <a:r>
               <a:rPr lang="ko-KR" altLang="en-US" sz="1500" b="1">
@@ -9985,95 +10095,7 @@
                   </a:schemeClr>
                 </a:solidFill>
               </a:rPr>
-              <a:t>공사</a:t>
-            </a:r>
-            <a:r>
-              <a:rPr lang="en-US" altLang="ko-KR" sz="1500" b="1">
-                <a:solidFill>
-                  <a:schemeClr val="tx1">
-                    <a:lumMod val="50000"/>
-                    <a:lumOff val="50000"/>
-                  </a:schemeClr>
-                </a:solidFill>
-              </a:rPr>
-              <a:t>, </a:t>
-            </a:r>
-            <a:r>
-              <a:rPr lang="ko-KR" altLang="en-US" sz="1500" b="1">
-                <a:solidFill>
-                  <a:schemeClr val="tx1">
-                    <a:lumMod val="50000"/>
-                    <a:lumOff val="50000"/>
-                  </a:schemeClr>
-                </a:solidFill>
-              </a:rPr>
-              <a:t>재무</a:t>
-            </a:r>
-            <a:r>
-              <a:rPr lang="en-US" altLang="ko-KR" sz="1500" b="1">
-                <a:solidFill>
-                  <a:schemeClr val="tx1">
-                    <a:lumMod val="50000"/>
-                    <a:lumOff val="50000"/>
-                  </a:schemeClr>
-                </a:solidFill>
-              </a:rPr>
-              <a:t>·</a:t>
-            </a:r>
-            <a:r>
-              <a:rPr lang="ko-KR" altLang="en-US" sz="1500" b="1">
-                <a:solidFill>
-                  <a:schemeClr val="tx1">
-                    <a:lumMod val="50000"/>
-                    <a:lumOff val="50000"/>
-                  </a:schemeClr>
-                </a:solidFill>
-              </a:rPr>
-              <a:t>회계 업무</a:t>
-            </a:r>
-            <a:r>
-              <a:rPr lang="en-US" altLang="ko-KR" sz="1500" b="1">
-                <a:solidFill>
-                  <a:schemeClr val="tx1">
-                    <a:lumMod val="50000"/>
-                    <a:lumOff val="50000"/>
-                  </a:schemeClr>
-                </a:solidFill>
-              </a:rPr>
-              <a:t>(9</a:t>
-            </a:r>
-            <a:r>
-              <a:rPr lang="ko-KR" altLang="en-US" sz="1500" b="1">
-                <a:solidFill>
-                  <a:schemeClr val="tx1">
-                    <a:lumMod val="50000"/>
-                    <a:lumOff val="50000"/>
-                  </a:schemeClr>
-                </a:solidFill>
-              </a:rPr>
-              <a:t>개 부서</a:t>
-            </a:r>
-            <a:r>
-              <a:rPr lang="en-US" altLang="ko-KR" sz="1500" b="1">
-                <a:solidFill>
-                  <a:schemeClr val="tx1">
-                    <a:lumMod val="50000"/>
-                    <a:lumOff val="50000"/>
-                  </a:schemeClr>
-                </a:solidFill>
-              </a:rPr>
-              <a:t>) </a:t>
-            </a:r>
-            <a:r>
-              <a:rPr lang="ko-KR" altLang="en-US" sz="1500" b="1">
-                <a:solidFill>
-                  <a:schemeClr val="tx1">
-                    <a:lumMod val="50000"/>
-                    <a:lumOff val="50000"/>
-                  </a:schemeClr>
-                </a:solidFill>
-              </a:rPr>
-              <a:t>중심으로 우선 진행</a:t>
+              <a:t>으로 우선 진행</a:t>
             </a:r>
           </a:p>
         </p:txBody>
@@ -12512,6 +12534,7 @@
       <p:pic>
         <p:nvPicPr>
           <p:cNvPr id="34" name="그림 33">
+            <a:hlinkClick r:id="rId5" action="ppaction://hlinkfile"/>
             <a:extLst>
               <a:ext uri="{FF2B5EF4-FFF2-40B4-BE49-F238E27FC236}">
                 <a16:creationId xmlns:a16="http://schemas.microsoft.com/office/drawing/2014/main" id="{E98EEE92-2BAD-48E7-A9E1-5FE5B50C593C}"/>
@@ -12524,7 +12547,7 @@
           <p:nvPr/>
         </p:nvPicPr>
         <p:blipFill rotWithShape="1">
-          <a:blip r:embed="rId5"/>
+          <a:blip r:embed="rId6"/>
           <a:stretch/>
         </p:blipFill>
         <p:spPr>
@@ -13250,7 +13273,7 @@
           <p:nvPr/>
         </p:nvPicPr>
         <p:blipFill>
-          <a:blip r:embed="rId6"/>
+          <a:blip r:embed="rId7"/>
           <a:stretch>
             <a:fillRect/>
           </a:stretch>
@@ -13280,7 +13303,7 @@
           <p:nvPr/>
         </p:nvPicPr>
         <p:blipFill>
-          <a:blip r:embed="rId7"/>
+          <a:blip r:embed="rId8"/>
           <a:stretch>
             <a:fillRect/>
           </a:stretch>
@@ -13310,13 +13333,13 @@
           <p:nvPr/>
         </p:nvPicPr>
         <p:blipFill>
-          <a:blip r:embed="rId8">
+          <a:blip r:embed="rId9">
             <a:extLst>
               <a:ext uri="{28A0092B-C50C-407E-A947-70E740481C1C}">
                 <a14:useLocalDpi xmlns:a14="http://schemas.microsoft.com/office/drawing/2010/main" val="0"/>
               </a:ext>
               <a:ext uri="{96DAC541-7B7A-43D3-8B79-37D633B846F1}">
-                <asvg:svgBlip xmlns:asvg="http://schemas.microsoft.com/office/drawing/2016/SVG/main" r:embed="rId9"/>
+                <asvg:svgBlip xmlns:asvg="http://schemas.microsoft.com/office/drawing/2016/SVG/main" r:embed="rId10"/>
               </a:ext>
             </a:extLst>
           </a:blip>

--- a/presentation/260916_AI활용_업무지침네비게이터_2차 수정.pptx
+++ b/presentation/260916_AI활용_업무지침네비게이터_2차 수정.pptx
@@ -524,7 +524,7 @@
           <a:p>
             <a:fld id="{6AC0F0B2-DC44-4D7F-B9BC-23EB46679998}" type="datetimeFigureOut">
               <a:rPr lang="ko-KR" altLang="en-US" smtClean="0"/>
-              <a:t>2026-09-10</a:t>
+              <a:t>2026-09-11</a:t>
             </a:fld>
             <a:endParaRPr lang="ko-KR" altLang="en-US"/>
           </a:p>
@@ -694,7 +694,7 @@
           <a:p>
             <a:fld id="{6AC0F0B2-DC44-4D7F-B9BC-23EB46679998}" type="datetimeFigureOut">
               <a:rPr lang="ko-KR" altLang="en-US" smtClean="0"/>
-              <a:t>2026-09-10</a:t>
+              <a:t>2026-09-11</a:t>
             </a:fld>
             <a:endParaRPr lang="ko-KR" altLang="en-US"/>
           </a:p>
@@ -874,7 +874,7 @@
           <a:p>
             <a:fld id="{6AC0F0B2-DC44-4D7F-B9BC-23EB46679998}" type="datetimeFigureOut">
               <a:rPr lang="ko-KR" altLang="en-US" smtClean="0"/>
-              <a:t>2026-09-10</a:t>
+              <a:t>2026-09-11</a:t>
             </a:fld>
             <a:endParaRPr lang="ko-KR" altLang="en-US"/>
           </a:p>
@@ -1044,7 +1044,7 @@
           <a:p>
             <a:fld id="{6AC0F0B2-DC44-4D7F-B9BC-23EB46679998}" type="datetimeFigureOut">
               <a:rPr lang="ko-KR" altLang="en-US" smtClean="0"/>
-              <a:t>2026-09-10</a:t>
+              <a:t>2026-09-11</a:t>
             </a:fld>
             <a:endParaRPr lang="ko-KR" altLang="en-US"/>
           </a:p>
@@ -1288,7 +1288,7 @@
           <a:p>
             <a:fld id="{6AC0F0B2-DC44-4D7F-B9BC-23EB46679998}" type="datetimeFigureOut">
               <a:rPr lang="ko-KR" altLang="en-US" smtClean="0"/>
-              <a:t>2026-09-10</a:t>
+              <a:t>2026-09-11</a:t>
             </a:fld>
             <a:endParaRPr lang="ko-KR" altLang="en-US"/>
           </a:p>
@@ -1520,7 +1520,7 @@
           <a:p>
             <a:fld id="{6AC0F0B2-DC44-4D7F-B9BC-23EB46679998}" type="datetimeFigureOut">
               <a:rPr lang="ko-KR" altLang="en-US" smtClean="0"/>
-              <a:t>2026-09-10</a:t>
+              <a:t>2026-09-11</a:t>
             </a:fld>
             <a:endParaRPr lang="ko-KR" altLang="en-US"/>
           </a:p>
@@ -1887,7 +1887,7 @@
           <a:p>
             <a:fld id="{6AC0F0B2-DC44-4D7F-B9BC-23EB46679998}" type="datetimeFigureOut">
               <a:rPr lang="ko-KR" altLang="en-US" smtClean="0"/>
-              <a:t>2026-09-10</a:t>
+              <a:t>2026-09-11</a:t>
             </a:fld>
             <a:endParaRPr lang="ko-KR" altLang="en-US"/>
           </a:p>
@@ -2005,7 +2005,7 @@
           <a:p>
             <a:fld id="{6AC0F0B2-DC44-4D7F-B9BC-23EB46679998}" type="datetimeFigureOut">
               <a:rPr lang="ko-KR" altLang="en-US" smtClean="0"/>
-              <a:t>2026-09-10</a:t>
+              <a:t>2026-09-11</a:t>
             </a:fld>
             <a:endParaRPr lang="ko-KR" altLang="en-US"/>
           </a:p>
@@ -2100,7 +2100,7 @@
           <a:p>
             <a:fld id="{6AC0F0B2-DC44-4D7F-B9BC-23EB46679998}" type="datetimeFigureOut">
               <a:rPr lang="ko-KR" altLang="en-US" smtClean="0"/>
-              <a:t>2026-09-10</a:t>
+              <a:t>2026-09-11</a:t>
             </a:fld>
             <a:endParaRPr lang="ko-KR" altLang="en-US"/>
           </a:p>
@@ -2377,7 +2377,7 @@
           <a:p>
             <a:fld id="{6AC0F0B2-DC44-4D7F-B9BC-23EB46679998}" type="datetimeFigureOut">
               <a:rPr lang="ko-KR" altLang="en-US" smtClean="0"/>
-              <a:t>2026-09-10</a:t>
+              <a:t>2026-09-11</a:t>
             </a:fld>
             <a:endParaRPr lang="ko-KR" altLang="en-US"/>
           </a:p>
@@ -2634,7 +2634,7 @@
           <a:p>
             <a:fld id="{6AC0F0B2-DC44-4D7F-B9BC-23EB46679998}" type="datetimeFigureOut">
               <a:rPr lang="ko-KR" altLang="en-US" smtClean="0"/>
-              <a:t>2026-09-10</a:t>
+              <a:t>2026-09-11</a:t>
             </a:fld>
             <a:endParaRPr lang="ko-KR" altLang="en-US"/>
           </a:p>
@@ -2847,7 +2847,7 @@
           <a:p>
             <a:fld id="{6AC0F0B2-DC44-4D7F-B9BC-23EB46679998}" type="datetimeFigureOut">
               <a:rPr lang="ko-KR" altLang="en-US" smtClean="0"/>
-              <a:t>2026-09-10</a:t>
+              <a:t>2026-09-11</a:t>
             </a:fld>
             <a:endParaRPr lang="ko-KR" altLang="en-US"/>
           </a:p>
@@ -12983,7 +12983,7 @@
         <p:spPr>
           <a:xfrm>
             <a:off x="6742343" y="5937415"/>
-            <a:ext cx="749422" cy="369332"/>
+            <a:ext cx="1049280" cy="369332"/>
           </a:xfrm>
           <a:prstGeom prst="rect">
             <a:avLst/>
@@ -13000,7 +13000,7 @@
               <a:rPr lang="en-US" altLang="ko-KR" b="1">
                 <a:latin typeface="+mn-ea"/>
               </a:rPr>
-              <a:t>15</a:t>
+              <a:t>56</a:t>
             </a:r>
             <a:r>
               <a:rPr lang="ko-KR" altLang="en-US" b="1">
